--- a/media/exports/reports/2025-10/growth-services.pptx
+++ b/media/exports/reports/2025-10/growth-services.pptx
@@ -213,43 +213,43 @@
                 <c:formatCode>$#,##0;[Red]($#,##0);"-"</c:formatCode>
                 <c:ptCount val="13"/>
                 <c:pt idx="0">
-                  <c:v>94520</c:v>
+                  <c:v>103550</c:v>
                 </c:pt>
                 <c:pt idx="1">
-                  <c:v>108140</c:v>
+                  <c:v>118390</c:v>
                 </c:pt>
                 <c:pt idx="2">
-                  <c:v>114895</c:v>
+                  <c:v>125715</c:v>
                 </c:pt>
                 <c:pt idx="3">
-                  <c:v>88250</c:v>
+                  <c:v>96560</c:v>
                 </c:pt>
                 <c:pt idx="4">
-                  <c:v>111010</c:v>
+                  <c:v>121275</c:v>
                 </c:pt>
                 <c:pt idx="5">
-                  <c:v>77175</c:v>
+                  <c:v>84340</c:v>
                 </c:pt>
                 <c:pt idx="6">
-                  <c:v>63970</c:v>
+                  <c:v>69985</c:v>
                 </c:pt>
                 <c:pt idx="7">
-                  <c:v>95555</c:v>
+                  <c:v>104970</c:v>
                 </c:pt>
                 <c:pt idx="8">
-                  <c:v>90220</c:v>
+                  <c:v>99060</c:v>
                 </c:pt>
                 <c:pt idx="9">
-                  <c:v>86320</c:v>
+                  <c:v>94805</c:v>
                 </c:pt>
                 <c:pt idx="10">
-                  <c:v>61475</c:v>
+                  <c:v>67745</c:v>
                 </c:pt>
                 <c:pt idx="11">
-                  <c:v>59535</c:v>
+                  <c:v>65650</c:v>
                 </c:pt>
                 <c:pt idx="12">
-                  <c:v>71260</c:v>
+                  <c:v>78550</c:v>
                 </c:pt>
               </c:numCache>
             </c:numRef>
@@ -298,7 +298,7 @@
         <c:axId val="-2100718248"/>
         <c:scaling>
           <c:orientation val="minMax"/>
-          <c:max val="125000.0"/>
+          <c:max val="150000.0"/>
           <c:min val="0.0"/>
         </c:scaling>
         <c:delete val="0"/>
@@ -333,7 +333,7 @@
         <c:crossAx val="-2101159928"/>
         <c:crosses val="autoZero"/>
         <c:crossBetween val="midCat"/>
-        <c:majorUnit val="25000.0"/>
+        <c:majorUnit val="50000.0"/>
       </c:valAx>
     </c:plotArea>
     <c:plotVisOnly val="1"/>
@@ -459,43 +459,43 @@
                 <c:formatCode>$#,##0;[Red]($#,##0);"-"</c:formatCode>
                 <c:ptCount val="13"/>
                 <c:pt idx="0">
-                  <c:v>70720</c:v>
+                  <c:v>77350</c:v>
                 </c:pt>
                 <c:pt idx="1">
-                  <c:v>88540</c:v>
+                  <c:v>96790</c:v>
                 </c:pt>
                 <c:pt idx="2">
-                  <c:v>94695</c:v>
+                  <c:v>103515</c:v>
                 </c:pt>
                 <c:pt idx="3">
-                  <c:v>66850</c:v>
+                  <c:v>73060</c:v>
                 </c:pt>
                 <c:pt idx="4">
-                  <c:v>84410</c:v>
+                  <c:v>92075</c:v>
                 </c:pt>
                 <c:pt idx="5">
-                  <c:v>48975</c:v>
+                  <c:v>53340</c:v>
                 </c:pt>
                 <c:pt idx="6">
-                  <c:v>37570</c:v>
+                  <c:v>40885</c:v>
                 </c:pt>
                 <c:pt idx="7">
-                  <c:v>59755</c:v>
+                  <c:v>65570</c:v>
                 </c:pt>
                 <c:pt idx="8">
-                  <c:v>64520</c:v>
+                  <c:v>70760</c:v>
                 </c:pt>
                 <c:pt idx="9">
-                  <c:v>64820</c:v>
+                  <c:v>71205</c:v>
                 </c:pt>
                 <c:pt idx="10">
-                  <c:v>38775</c:v>
+                  <c:v>42845</c:v>
                 </c:pt>
                 <c:pt idx="11">
-                  <c:v>38035</c:v>
+                  <c:v>42050</c:v>
                 </c:pt>
                 <c:pt idx="12">
-                  <c:v>45860</c:v>
+                  <c:v>50650</c:v>
                 </c:pt>
               </c:numCache>
             </c:numRef>
@@ -544,7 +544,7 @@
         <c:axId val="-2100718248"/>
         <c:scaling>
           <c:orientation val="minMax"/>
-          <c:max val="100000.0"/>
+          <c:max val="125000.0"/>
           <c:min val="0.0"/>
         </c:scaling>
         <c:delete val="0"/>
@@ -579,7 +579,7 @@
         <c:crossAx val="-2101159928"/>
         <c:crosses val="autoZero"/>
         <c:crossBetween val="midCat"/>
-        <c:majorUnit val="20000.0"/>
+        <c:majorUnit val="25000.0"/>
       </c:valAx>
     </c:plotArea>
     <c:plotVisOnly val="1"/>
@@ -705,43 +705,43 @@
                 <c:formatCode>$#,##0;[Red]($#,##0);"-"</c:formatCode>
                 <c:ptCount val="13"/>
                 <c:pt idx="0">
-                  <c:v>15000</c:v>
+                  <c:v>16500</c:v>
                 </c:pt>
                 <c:pt idx="1">
-                  <c:v>15000</c:v>
+                  <c:v>16500</c:v>
                 </c:pt>
                 <c:pt idx="2">
-                  <c:v>15000</c:v>
+                  <c:v>16500</c:v>
                 </c:pt>
                 <c:pt idx="3">
-                  <c:v>15000</c:v>
+                  <c:v>16500</c:v>
                 </c:pt>
                 <c:pt idx="4">
-                  <c:v>15000</c:v>
+                  <c:v>16500</c:v>
                 </c:pt>
                 <c:pt idx="5">
-                  <c:v>21800</c:v>
+                  <c:v>24000</c:v>
                 </c:pt>
                 <c:pt idx="6">
-                  <c:v>21800</c:v>
+                  <c:v>24000</c:v>
                 </c:pt>
                 <c:pt idx="7">
-                  <c:v>21800</c:v>
+                  <c:v>24000</c:v>
                 </c:pt>
                 <c:pt idx="8">
-                  <c:v>21800</c:v>
+                  <c:v>24000</c:v>
                 </c:pt>
                 <c:pt idx="9">
-                  <c:v>16300</c:v>
+                  <c:v>17900</c:v>
                 </c:pt>
                 <c:pt idx="10">
-                  <c:v>16300</c:v>
+                  <c:v>17900</c:v>
                 </c:pt>
                 <c:pt idx="11">
-                  <c:v>16300</c:v>
+                  <c:v>17900</c:v>
                 </c:pt>
                 <c:pt idx="12">
-                  <c:v>16300</c:v>
+                  <c:v>17900</c:v>
                 </c:pt>
               </c:numCache>
             </c:numRef>
@@ -951,43 +951,43 @@
                 <c:formatCode>$#,##0;[Red]($#,##0);"-"</c:formatCode>
                 <c:ptCount val="13"/>
                 <c:pt idx="0">
-                  <c:v>8800</c:v>
+                  <c:v>9700</c:v>
                 </c:pt>
                 <c:pt idx="1">
-                  <c:v>4600</c:v>
+                  <c:v>5100</c:v>
                 </c:pt>
                 <c:pt idx="2">
-                  <c:v>5200</c:v>
+                  <c:v>5700</c:v>
                 </c:pt>
                 <c:pt idx="3">
-                  <c:v>6400</c:v>
+                  <c:v>7000</c:v>
                 </c:pt>
                 <c:pt idx="4">
-                  <c:v>11600</c:v>
+                  <c:v>12700</c:v>
                 </c:pt>
                 <c:pt idx="5">
-                  <c:v>6400</c:v>
+                  <c:v>7000</c:v>
                 </c:pt>
                 <c:pt idx="6">
-                  <c:v>4600</c:v>
+                  <c:v>5100</c:v>
                 </c:pt>
                 <c:pt idx="7">
-                  <c:v>14000</c:v>
+                  <c:v>15400</c:v>
                 </c:pt>
                 <c:pt idx="8">
-                  <c:v>3900</c:v>
+                  <c:v>4300</c:v>
                 </c:pt>
                 <c:pt idx="9">
-                  <c:v>5200</c:v>
+                  <c:v>5700</c:v>
                 </c:pt>
                 <c:pt idx="10">
-                  <c:v>6400</c:v>
+                  <c:v>7000</c:v>
                 </c:pt>
                 <c:pt idx="11">
-                  <c:v>5200</c:v>
+                  <c:v>5700</c:v>
                 </c:pt>
                 <c:pt idx="12">
-                  <c:v>9100</c:v>
+                  <c:v>10000</c:v>
                 </c:pt>
               </c:numCache>
             </c:numRef>
@@ -1036,7 +1036,7 @@
         <c:axId val="-2100718248"/>
         <c:scaling>
           <c:orientation val="minMax"/>
-          <c:max val="15000.0"/>
+          <c:max val="20000.0"/>
           <c:min val="0.0"/>
         </c:scaling>
         <c:delete val="0"/>
@@ -1561,7 +1561,7 @@
           <a:lstStyle/>
           <a:p>
             <a:r>
-              <a:t>Services · All. October against October last year: (24.6%); Year to date (Jul to Oct 2025): $278,590; Gross margin, year to date: 64.1%. Revenue is $278,590 this financial year to date (Jul to Oct 2025). Training makes the highest gross margin (78.0%); Projects the lowest (61.8%). The business needs 93.3% gross margin just to cover overheads. Projects: 61.8% gross margin, 21.8 points over the 40.0% target ($40,934 ahead on $187,490 this financial year to date). Training: 78.0% gross margin, 38.0 points over the 40.0% target ($9,840 ahead on $25,900 this financial year to date).</a:t>
+              <a:t>Services · All. October against October last year: (24.1%); Year to date (Jul to Oct 2025): $306,750; Gross margin, year to date: 67.4%. Revenue is $306,750 this financial year to date (Jul to Oct 2025). Training makes the highest gross margin (79.9%); Projects the lowest (65.4%). The business needs 99.2% gross margin just to cover overheads. Projects: 65.4% gross margin, 25.4 points over the 40.0% target ($52,490 ahead on $206,750 this financial year to date). Training: 79.9% gross margin, 39.9 points over the 40.0% target ($11,340 ahead on $28,400 this financial year to date).</a:t>
             </a:r>
           </a:p>
         </p:txBody>
@@ -1631,7 +1631,7 @@
           <a:lstStyle/>
           <a:p>
             <a:r>
-              <a:t>Services · Projects. October against October last year: (35.2%); Year to date (Jul to Oct 2025): $187,490; Gross margin, year to date: 61.8%. Projects brought in $187,490 this financial year to date, at a 61.8% gross margin (below the 64.1% overall). Projects: 61.8% gross margin, 21.8 points over the 40.0% target ($40,934 ahead on $187,490 this financial year to date).</a:t>
+              <a:t>Services · Projects. October against October last year: (34.5%); Year to date (Jul to Oct 2025): $206,750; Gross margin, year to date: 65.4%. Projects brought in $206,750 this financial year to date, at a 65.4% gross margin (below the 67.4% overall). Projects: 65.4% gross margin, 25.4 points over the 40.0% target ($52,490 ahead on $206,750 this financial year to date).</a:t>
             </a:r>
           </a:p>
         </p:txBody>
@@ -1701,7 +1701,7 @@
           <a:lstStyle/>
           <a:p>
             <a:r>
-              <a:t>Services · Retainers. October against October last year: 8.7%; Year to date (Jul to Oct 2025): $65,200; Gross margin, year to date: 65.1%. Retainers brought in $65,200 this financial year to date, at a 65.1% gross margin (above the 64.1% overall). Retainers: 65.1% gross margin, 25.1 points over the 40.0% target ($16,380 ahead on $65,200 this financial year to date).</a:t>
+              <a:t>Services · Retainers. October against October last year: 8.5%; Year to date (Jul to Oct 2025): $71,600; Gross margin, year to date: 68.2%. Retainers brought in $71,600 this financial year to date, at a 68.2% gross margin (above the 67.4% overall). Retainers: 68.2% gross margin, 28.2 points over the 40.0% target ($20,220 ahead on $71,600 this financial year to date).</a:t>
             </a:r>
           </a:p>
         </p:txBody>
@@ -1771,7 +1771,7 @@
           <a:lstStyle/>
           <a:p>
             <a:r>
-              <a:t>Services · Training. October against October last year: 3.4%; Year to date (Jul to Oct 2025): $25,900; Gross margin, year to date: 78.0%. Training brought in $25,900 this financial year to date, at a 78.0% gross margin (above the 64.1% overall). Training: 78.0% gross margin, 38.0 points over the 40.0% target ($9,840 ahead on $25,900 this financial year to date).</a:t>
+              <a:t>Services · Training. October against October last year: 3.1%; Year to date (Jul to Oct 2025): $28,400; Gross margin, year to date: 79.9%. Training brought in $28,400 this financial year to date, at a 79.9% gross margin (above the 67.4% overall). Training: 79.9% gross margin, 39.9 points over the 40.0% target ($11,340 ahead on $28,400 this financial year to date).</a:t>
             </a:r>
           </a:p>
         </p:txBody>
@@ -1841,7 +1841,7 @@
           <a:lstStyle/>
           <a:p>
             <a:r>
-              <a:t>By type of work: financial year to date (Jul to Oct 2025) against the same period last year · Services. Same period last year: Not available: the data starts October 2024. From gross margin to profit: October's client work made $45,720 gross margin (64.2%). Consultant time not charged to client work took $15,410 and overheads $51,070, leaving ($20,760) profit before tax ((29.1%) of revenue). To cover overheads, client work needs a 93.3% gross margin on average.</a:t>
+              <a:t>By type of work: financial year to date (Jul to Oct 2025) against the same period last year · Services. Same period last year: Not available: the data starts October 2024. From gross margin to profit: October's client work made $53,010 gross margin (67.5%). Consultant time not charged to client work took $26,820 and overheads $51,070, leaving ($24,880) profit before tax ((31.7%) of revenue). To cover overheads, client work needs a 99.2% gross margin on average.</a:t>
             </a:r>
           </a:p>
         </p:txBody>
@@ -5256,7 +5256,7 @@
                 </a:solidFill>
                 <a:latin typeface="Roboto"/>
               </a:rPr>
-              <a:t>Data retrieved 2pm, Tue 6 Oct 2026 · Generated 8 Oct 2026, 9:35am · Sample data · Made with Python (python-pptx)</a:t>
+              <a:t>Data retrieved 2pm, Tue 6 Oct 2026 · Generated 9 Oct 2026, 8:41am · Sample data · Made with Python (python-pptx)</a:t>
             </a:r>
           </a:p>
         </p:txBody>
@@ -5602,7 +5602,7 @@
                 </a:solidFill>
                 <a:latin typeface="Roboto"/>
               </a:rPr>
-              <a:t>(24.6%)</a:t>
+              <a:t>(24.1%)</a:t>
             </a:r>
           </a:p>
         </p:txBody>
@@ -5641,7 +5641,7 @@
                 </a:solidFill>
                 <a:latin typeface="Roboto"/>
               </a:rPr>
-              <a:t>$71,260 against $94,520</a:t>
+              <a:t>$78,550 against $103,550</a:t>
             </a:r>
           </a:p>
         </p:txBody>
@@ -5768,7 +5768,7 @@
                 </a:solidFill>
                 <a:latin typeface="Roboto"/>
               </a:rPr>
-              <a:t>$278,590</a:t>
+              <a:t>$306,750</a:t>
             </a:r>
           </a:p>
         </p:txBody>
@@ -5934,7 +5934,7 @@
                 </a:solidFill>
                 <a:latin typeface="Roboto"/>
               </a:rPr>
-              <a:t>64.1%</a:t>
+              <a:t>67.4%</a:t>
             </a:r>
           </a:p>
         </p:txBody>
@@ -5973,7 +5973,7 @@
                 </a:solidFill>
                 <a:latin typeface="Roboto"/>
               </a:rPr>
-              <a:t>$178,590 before overheads</a:t>
+              <a:t>$206,750 before overheads</a:t>
             </a:r>
           </a:p>
         </p:txBody>
@@ -6118,7 +6118,7 @@
                 </a:solidFill>
                 <a:latin typeface="Roboto"/>
               </a:rPr>
-              <a:t>Revenue is $278,590 this financial year to date (Jul to Oct 2025). Training makes the highest gross margin (78.0%); Projects the lowest (61.8%). The business needs 93.3% gross margin just to cover overheads.</a:t>
+              <a:t>Revenue is $306,750 this financial year to date (Jul to Oct 2025). Training makes the highest gross margin (79.9%); Projects the lowest (65.4%). The business needs 99.2% gross margin just to cover overheads.</a:t>
             </a:r>
           </a:p>
         </p:txBody>
@@ -6245,7 +6245,7 @@
                 </a:solidFill>
                 <a:latin typeface="Roboto"/>
               </a:rPr>
-              <a:t>Projects: 61.8% gross margin, 21.8 points over the 40.0% target ($40,934 ahead on $187,490 this financial year to date). Training: 78.0% gross margin, 38.0 points over the 40.0% target ($9,840 ahead on $25,900 this financial year to date).</a:t>
+              <a:t>Projects: 65.4% gross margin, 25.4 points over the 40.0% target ($52,490 ahead on $206,750 this financial year to date). Training: 79.9% gross margin, 39.9 points over the 40.0% target ($11,340 ahead on $28,400 this financial year to date).</a:t>
             </a:r>
           </a:p>
         </p:txBody>
@@ -6323,7 +6323,7 @@
                 </a:solidFill>
                 <a:latin typeface="Roboto"/>
               </a:rPr>
-              <a:t>Data retrieved 2pm, Tue 6 Oct 2026 · Generated 8 Oct 2026, 9:35am · Sample data · Made with Python (python-pptx)</a:t>
+              <a:t>Data retrieved 2pm, Tue 6 Oct 2026 · Generated 9 Oct 2026, 8:41am · Sample data · Made with Python (python-pptx)</a:t>
             </a:r>
           </a:p>
         </p:txBody>
@@ -6669,7 +6669,7 @@
                 </a:solidFill>
                 <a:latin typeface="Roboto"/>
               </a:rPr>
-              <a:t>(35.2%)</a:t>
+              <a:t>(34.5%)</a:t>
             </a:r>
           </a:p>
         </p:txBody>
@@ -6708,7 +6708,7 @@
                 </a:solidFill>
                 <a:latin typeface="Roboto"/>
               </a:rPr>
-              <a:t>$45,860 against $70,720</a:t>
+              <a:t>$50,650 against $77,350</a:t>
             </a:r>
           </a:p>
         </p:txBody>
@@ -6835,7 +6835,7 @@
                 </a:solidFill>
                 <a:latin typeface="Roboto"/>
               </a:rPr>
-              <a:t>$187,490</a:t>
+              <a:t>$206,750</a:t>
             </a:r>
           </a:p>
         </p:txBody>
@@ -7001,7 +7001,7 @@
                 </a:solidFill>
                 <a:latin typeface="Roboto"/>
               </a:rPr>
-              <a:t>61.8%</a:t>
+              <a:t>65.4%</a:t>
             </a:r>
           </a:p>
         </p:txBody>
@@ -7040,7 +7040,7 @@
                 </a:solidFill>
                 <a:latin typeface="Roboto"/>
               </a:rPr>
-              <a:t>$115,930 before overheads</a:t>
+              <a:t>$135,190 before overheads</a:t>
             </a:r>
           </a:p>
         </p:txBody>
@@ -7185,7 +7185,7 @@
                 </a:solidFill>
                 <a:latin typeface="Roboto"/>
               </a:rPr>
-              <a:t>Projects brought in $187,490 this financial year to date, at a 61.8% gross margin (below the 64.1% overall).</a:t>
+              <a:t>Projects brought in $206,750 this financial year to date, at a 65.4% gross margin (below the 67.4% overall).</a:t>
             </a:r>
           </a:p>
         </p:txBody>
@@ -7312,7 +7312,7 @@
                 </a:solidFill>
                 <a:latin typeface="Roboto"/>
               </a:rPr>
-              <a:t>Projects: 61.8% gross margin, 21.8 points over the 40.0% target ($40,934 ahead on $187,490 this financial year to date).</a:t>
+              <a:t>Projects: 65.4% gross margin, 25.4 points over the 40.0% target ($52,490 ahead on $206,750 this financial year to date).</a:t>
             </a:r>
           </a:p>
         </p:txBody>
@@ -7390,7 +7390,7 @@
                 </a:solidFill>
                 <a:latin typeface="Roboto"/>
               </a:rPr>
-              <a:t>Data retrieved 2pm, Tue 6 Oct 2026 · Generated 8 Oct 2026, 9:35am · Sample data · Made with Python (python-pptx)</a:t>
+              <a:t>Data retrieved 2pm, Tue 6 Oct 2026 · Generated 9 Oct 2026, 8:41am · Sample data · Made with Python (python-pptx)</a:t>
             </a:r>
           </a:p>
         </p:txBody>
@@ -7736,7 +7736,7 @@
                 </a:solidFill>
                 <a:latin typeface="Roboto"/>
               </a:rPr>
-              <a:t>8.7%</a:t>
+              <a:t>8.5%</a:t>
             </a:r>
           </a:p>
         </p:txBody>
@@ -7775,7 +7775,7 @@
                 </a:solidFill>
                 <a:latin typeface="Roboto"/>
               </a:rPr>
-              <a:t>$16,300 against $15,000</a:t>
+              <a:t>$17,900 against $16,500</a:t>
             </a:r>
           </a:p>
         </p:txBody>
@@ -7902,7 +7902,7 @@
                 </a:solidFill>
                 <a:latin typeface="Roboto"/>
               </a:rPr>
-              <a:t>$65,200</a:t>
+              <a:t>$71,600</a:t>
             </a:r>
           </a:p>
         </p:txBody>
@@ -8068,7 +8068,7 @@
                 </a:solidFill>
                 <a:latin typeface="Roboto"/>
               </a:rPr>
-              <a:t>65.1%</a:t>
+              <a:t>68.2%</a:t>
             </a:r>
           </a:p>
         </p:txBody>
@@ -8107,7 +8107,7 @@
                 </a:solidFill>
                 <a:latin typeface="Roboto"/>
               </a:rPr>
-              <a:t>$42,460 before overheads</a:t>
+              <a:t>$48,860 before overheads</a:t>
             </a:r>
           </a:p>
         </p:txBody>
@@ -8252,7 +8252,7 @@
                 </a:solidFill>
                 <a:latin typeface="Roboto"/>
               </a:rPr>
-              <a:t>Retainers brought in $65,200 this financial year to date, at a 65.1% gross margin (above the 64.1% overall).</a:t>
+              <a:t>Retainers brought in $71,600 this financial year to date, at a 68.2% gross margin (above the 67.4% overall).</a:t>
             </a:r>
           </a:p>
         </p:txBody>
@@ -8379,7 +8379,7 @@
                 </a:solidFill>
                 <a:latin typeface="Roboto"/>
               </a:rPr>
-              <a:t>Retainers: 65.1% gross margin, 25.1 points over the 40.0% target ($16,380 ahead on $65,200 this financial year to date).</a:t>
+              <a:t>Retainers: 68.2% gross margin, 28.2 points over the 40.0% target ($20,220 ahead on $71,600 this financial year to date).</a:t>
             </a:r>
           </a:p>
         </p:txBody>
@@ -8457,7 +8457,7 @@
                 </a:solidFill>
                 <a:latin typeface="Roboto"/>
               </a:rPr>
-              <a:t>Data retrieved 2pm, Tue 6 Oct 2026 · Generated 8 Oct 2026, 9:35am · Sample data · Made with Python (python-pptx)</a:t>
+              <a:t>Data retrieved 2pm, Tue 6 Oct 2026 · Generated 9 Oct 2026, 8:41am · Sample data · Made with Python (python-pptx)</a:t>
             </a:r>
           </a:p>
         </p:txBody>
@@ -8803,7 +8803,7 @@
                 </a:solidFill>
                 <a:latin typeface="Roboto"/>
               </a:rPr>
-              <a:t>3.4%</a:t>
+              <a:t>3.1%</a:t>
             </a:r>
           </a:p>
         </p:txBody>
@@ -8842,7 +8842,7 @@
                 </a:solidFill>
                 <a:latin typeface="Roboto"/>
               </a:rPr>
-              <a:t>$9,100 against $8,800</a:t>
+              <a:t>$10,000 against $9,700</a:t>
             </a:r>
           </a:p>
         </p:txBody>
@@ -8969,7 +8969,7 @@
                 </a:solidFill>
                 <a:latin typeface="Roboto"/>
               </a:rPr>
-              <a:t>$25,900</a:t>
+              <a:t>$28,400</a:t>
             </a:r>
           </a:p>
         </p:txBody>
@@ -9135,7 +9135,7 @@
                 </a:solidFill>
                 <a:latin typeface="Roboto"/>
               </a:rPr>
-              <a:t>78.0%</a:t>
+              <a:t>79.9%</a:t>
             </a:r>
           </a:p>
         </p:txBody>
@@ -9174,7 +9174,7 @@
                 </a:solidFill>
                 <a:latin typeface="Roboto"/>
               </a:rPr>
-              <a:t>$20,200 before overheads</a:t>
+              <a:t>$22,700 before overheads</a:t>
             </a:r>
           </a:p>
         </p:txBody>
@@ -9319,7 +9319,7 @@
                 </a:solidFill>
                 <a:latin typeface="Roboto"/>
               </a:rPr>
-              <a:t>Training brought in $25,900 this financial year to date, at a 78.0% gross margin (above the 64.1% overall).</a:t>
+              <a:t>Training brought in $28,400 this financial year to date, at a 79.9% gross margin (above the 67.4% overall).</a:t>
             </a:r>
           </a:p>
         </p:txBody>
@@ -9446,7 +9446,7 @@
                 </a:solidFill>
                 <a:latin typeface="Roboto"/>
               </a:rPr>
-              <a:t>Training: 78.0% gross margin, 38.0 points over the 40.0% target ($9,840 ahead on $25,900 this financial year to date).</a:t>
+              <a:t>Training: 79.9% gross margin, 39.9 points over the 40.0% target ($11,340 ahead on $28,400 this financial year to date).</a:t>
             </a:r>
           </a:p>
         </p:txBody>
@@ -9524,7 +9524,7 @@
                 </a:solidFill>
                 <a:latin typeface="Roboto"/>
               </a:rPr>
-              <a:t>Data retrieved 2pm, Tue 6 Oct 2026 · Generated 8 Oct 2026, 9:35am · Sample data · Made with Python (python-pptx)</a:t>
+              <a:t>Data retrieved 2pm, Tue 6 Oct 2026 · Generated 9 Oct 2026, 8:41am · Sample data · Made with Python (python-pptx)</a:t>
             </a:r>
           </a:p>
         </p:txBody>
@@ -9743,7 +9743,7 @@
                 </a:solidFill>
                 <a:latin typeface="Roboto"/>
               </a:rPr>
-              <a:t>Same period last year: Not available: the data starts October 2024. From gross margin to profit: October's client work made $45,720 gross margin (64.2%). Consultant time not charged to client work took $15,410 and overheads $51,070, leaving ($20,760) profit before tax ((29.1%) of revenue). To cover overheads, client work needs a 93.3% gross margin on average.</a:t>
+              <a:t>Same period last year: Not available: the data starts October 2024. From gross margin to profit: October's client work made $53,010 gross margin (67.5%). Consultant time not charged to client work took $26,820 and overheads $51,070, leaving ($24,880) profit before tax ((31.7%) of revenue). To cover overheads, client work needs a 99.2% gross margin on average.</a:t>
             </a:r>
           </a:p>
         </p:txBody>
@@ -9974,7 +9974,7 @@
                           </a:solidFill>
                           <a:latin typeface="Roboto"/>
                         </a:rPr>
-                        <a:t>$187,490</a:t>
+                        <a:t>$206,750</a:t>
                       </a:r>
                     </a:p>
                   </a:txBody>
@@ -10055,7 +10055,7 @@
                           </a:solidFill>
                           <a:latin typeface="Roboto"/>
                         </a:rPr>
-                        <a:t>$115,930</a:t>
+                        <a:t>$135,190</a:t>
                       </a:r>
                     </a:p>
                   </a:txBody>
@@ -10082,7 +10082,7 @@
                           </a:solidFill>
                           <a:latin typeface="Roboto"/>
                         </a:rPr>
-                        <a:t>61.8%</a:t>
+                        <a:t>65.4%</a:t>
                       </a:r>
                     </a:p>
                   </a:txBody>
@@ -10138,7 +10138,7 @@
                           </a:solidFill>
                           <a:latin typeface="Roboto"/>
                         </a:rPr>
-                        <a:t>$65,200</a:t>
+                        <a:t>$71,600</a:t>
                       </a:r>
                     </a:p>
                   </a:txBody>
@@ -10219,7 +10219,7 @@
                           </a:solidFill>
                           <a:latin typeface="Roboto"/>
                         </a:rPr>
-                        <a:t>$42,460</a:t>
+                        <a:t>$48,860</a:t>
                       </a:r>
                     </a:p>
                   </a:txBody>
@@ -10246,7 +10246,7 @@
                           </a:solidFill>
                           <a:latin typeface="Roboto"/>
                         </a:rPr>
-                        <a:t>65.1%</a:t>
+                        <a:t>68.2%</a:t>
                       </a:r>
                     </a:p>
                   </a:txBody>
@@ -10302,7 +10302,7 @@
                           </a:solidFill>
                           <a:latin typeface="Roboto"/>
                         </a:rPr>
-                        <a:t>$25,900</a:t>
+                        <a:t>$28,400</a:t>
                       </a:r>
                     </a:p>
                   </a:txBody>
@@ -10383,7 +10383,7 @@
                           </a:solidFill>
                           <a:latin typeface="Roboto"/>
                         </a:rPr>
-                        <a:t>$20,200</a:t>
+                        <a:t>$22,700</a:t>
                       </a:r>
                     </a:p>
                   </a:txBody>
@@ -10410,7 +10410,7 @@
                           </a:solidFill>
                           <a:latin typeface="Roboto"/>
                         </a:rPr>
-                        <a:t>78.0%</a:t>
+                        <a:t>79.9%</a:t>
                       </a:r>
                     </a:p>
                   </a:txBody>
@@ -10466,7 +10466,7 @@
                           </a:solidFill>
                           <a:latin typeface="Roboto"/>
                         </a:rPr>
-                        <a:t>$278,590</a:t>
+                        <a:t>$306,750</a:t>
                       </a:r>
                     </a:p>
                   </a:txBody>
@@ -10547,7 +10547,7 @@
                           </a:solidFill>
                           <a:latin typeface="Roboto"/>
                         </a:rPr>
-                        <a:t>$178,590</a:t>
+                        <a:t>$206,750</a:t>
                       </a:r>
                     </a:p>
                   </a:txBody>
@@ -10574,7 +10574,7 @@
                           </a:solidFill>
                           <a:latin typeface="Roboto"/>
                         </a:rPr>
-                        <a:t>64.1%</a:t>
+                        <a:t>67.4%</a:t>
                       </a:r>
                     </a:p>
                   </a:txBody>
@@ -10662,7 +10662,7 @@
                 </a:solidFill>
                 <a:latin typeface="Roboto"/>
               </a:rPr>
-              <a:t>Data retrieved 2pm, Tue 6 Oct 2026 · Generated 8 Oct 2026, 9:35am · Sample data · Made with Python (python-pptx)</a:t>
+              <a:t>Data retrieved 2pm, Tue 6 Oct 2026 · Generated 9 Oct 2026, 8:41am · Sample data · Made with Python (python-pptx)</a:t>
             </a:r>
           </a:p>
         </p:txBody>
